--- a/耶穌的愛.pptx
+++ b/耶穌的愛.pptx
@@ -107,6 +107,22 @@
       </a:defRPr>
     </a:lvl9pPr>
   </p:defaultTextStyle>
+  <p:extLst>
+    <p:ext uri="{EFAFB233-063F-42B5-8137-9DF3F51BA10A}">
+      <p15:sldGuideLst xmlns:p15="http://schemas.microsoft.com/office/powerpoint/2012/main">
+        <p15:guide id="1" orient="horz" pos="2160">
+          <p15:clr>
+            <a:srgbClr val="A4A3A4"/>
+          </p15:clr>
+        </p15:guide>
+        <p15:guide id="2" pos="2880">
+          <p15:clr>
+            <a:srgbClr val="A4A3A4"/>
+          </p15:clr>
+        </p15:guide>
+      </p15:sldGuideLst>
+    </p:ext>
+  </p:extLst>
 </p:presentation>
 </file>
 
@@ -177,7 +193,7 @@
           </a:lstStyle>
           <a:p>
             <a:r>
-              <a:rPr kumimoji="0" lang="zh-TW" altLang="en-US" smtClean="0"/>
+              <a:rPr kumimoji="0" lang="zh-TW" altLang="en-US"/>
               <a:t>按一下以編輯母片標題樣式</a:t>
             </a:r>
             <a:endParaRPr kumimoji="0" lang="en-US"/>
@@ -294,7 +310,7 @@
           </a:lstStyle>
           <a:p>
             <a:r>
-              <a:rPr kumimoji="0" lang="zh-TW" altLang="en-US" smtClean="0"/>
+              <a:rPr kumimoji="0" lang="zh-TW" altLang="en-US"/>
               <a:t>按一下以編輯母片副標題樣式</a:t>
             </a:r>
             <a:endParaRPr kumimoji="0" lang="en-US"/>
@@ -319,7 +335,7 @@
             <a:fld id="{F77B2DE9-D998-46EE-A7F6-2451886AED5C}" type="datetimeFigureOut">
               <a:rPr lang="zh-TW" altLang="en-US" smtClean="0"/>
               <a:pPr/>
-              <a:t>2013/5/18</a:t>
+              <a:t>2026/7/20</a:t>
             </a:fld>
             <a:endParaRPr lang="zh-TW" altLang="en-US"/>
           </a:p>
@@ -409,7 +425,7 @@
           <a:lstStyle/>
           <a:p>
             <a:r>
-              <a:rPr kumimoji="0" lang="zh-TW" altLang="en-US" smtClean="0"/>
+              <a:rPr kumimoji="0" lang="zh-TW" altLang="en-US"/>
               <a:t>按一下以編輯母片標題樣式</a:t>
             </a:r>
             <a:endParaRPr kumimoji="0" lang="en-US"/>
@@ -433,35 +449,35 @@
           <a:p>
             <a:pPr lvl="0" eaLnBrk="1" latinLnBrk="0" hangingPunct="1"/>
             <a:r>
-              <a:rPr lang="zh-TW" altLang="en-US" smtClean="0"/>
+              <a:rPr lang="zh-TW" altLang="en-US"/>
               <a:t>按一下以編輯母片文字樣式</a:t>
             </a:r>
           </a:p>
           <a:p>
             <a:pPr lvl="1" eaLnBrk="1" latinLnBrk="0" hangingPunct="1"/>
             <a:r>
-              <a:rPr lang="zh-TW" altLang="en-US" smtClean="0"/>
+              <a:rPr lang="zh-TW" altLang="en-US"/>
               <a:t>第二層</a:t>
             </a:r>
           </a:p>
           <a:p>
             <a:pPr lvl="2" eaLnBrk="1" latinLnBrk="0" hangingPunct="1"/>
             <a:r>
-              <a:rPr lang="zh-TW" altLang="en-US" smtClean="0"/>
+              <a:rPr lang="zh-TW" altLang="en-US"/>
               <a:t>第三層</a:t>
             </a:r>
           </a:p>
           <a:p>
             <a:pPr lvl="3" eaLnBrk="1" latinLnBrk="0" hangingPunct="1"/>
             <a:r>
-              <a:rPr lang="zh-TW" altLang="en-US" smtClean="0"/>
+              <a:rPr lang="zh-TW" altLang="en-US"/>
               <a:t>第四層</a:t>
             </a:r>
           </a:p>
           <a:p>
             <a:pPr lvl="4" eaLnBrk="1" latinLnBrk="0" hangingPunct="1"/>
             <a:r>
-              <a:rPr lang="zh-TW" altLang="en-US" smtClean="0"/>
+              <a:rPr lang="zh-TW" altLang="en-US"/>
               <a:t>第五層</a:t>
             </a:r>
             <a:endParaRPr kumimoji="0" lang="en-US"/>
@@ -486,7 +502,7 @@
             <a:fld id="{F77B2DE9-D998-46EE-A7F6-2451886AED5C}" type="datetimeFigureOut">
               <a:rPr lang="zh-TW" altLang="en-US" smtClean="0"/>
               <a:pPr/>
-              <a:t>2013/5/18</a:t>
+              <a:t>2026/7/20</a:t>
             </a:fld>
             <a:endParaRPr lang="zh-TW" altLang="en-US"/>
           </a:p>
@@ -602,7 +618,7 @@
           </a:lstStyle>
           <a:p>
             <a:r>
-              <a:rPr kumimoji="0" lang="zh-TW" altLang="en-US" smtClean="0"/>
+              <a:rPr kumimoji="0" lang="zh-TW" altLang="en-US"/>
               <a:t>按一下以編輯母片標題樣式</a:t>
             </a:r>
             <a:endParaRPr kumimoji="0" lang="en-US"/>
@@ -631,35 +647,35 @@
           <a:p>
             <a:pPr lvl="0" eaLnBrk="1" latinLnBrk="0" hangingPunct="1"/>
             <a:r>
-              <a:rPr lang="zh-TW" altLang="en-US" smtClean="0"/>
+              <a:rPr lang="zh-TW" altLang="en-US"/>
               <a:t>按一下以編輯母片文字樣式</a:t>
             </a:r>
           </a:p>
           <a:p>
             <a:pPr lvl="1" eaLnBrk="1" latinLnBrk="0" hangingPunct="1"/>
             <a:r>
-              <a:rPr lang="zh-TW" altLang="en-US" smtClean="0"/>
+              <a:rPr lang="zh-TW" altLang="en-US"/>
               <a:t>第二層</a:t>
             </a:r>
           </a:p>
           <a:p>
             <a:pPr lvl="2" eaLnBrk="1" latinLnBrk="0" hangingPunct="1"/>
             <a:r>
-              <a:rPr lang="zh-TW" altLang="en-US" smtClean="0"/>
+              <a:rPr lang="zh-TW" altLang="en-US"/>
               <a:t>第三層</a:t>
             </a:r>
           </a:p>
           <a:p>
             <a:pPr lvl="3" eaLnBrk="1" latinLnBrk="0" hangingPunct="1"/>
             <a:r>
-              <a:rPr lang="zh-TW" altLang="en-US" smtClean="0"/>
+              <a:rPr lang="zh-TW" altLang="en-US"/>
               <a:t>第四層</a:t>
             </a:r>
           </a:p>
           <a:p>
             <a:pPr lvl="4" eaLnBrk="1" latinLnBrk="0" hangingPunct="1"/>
             <a:r>
-              <a:rPr lang="zh-TW" altLang="en-US" smtClean="0"/>
+              <a:rPr lang="zh-TW" altLang="en-US"/>
               <a:t>第五層</a:t>
             </a:r>
             <a:endParaRPr kumimoji="0" lang="en-US"/>
@@ -684,7 +700,7 @@
             <a:fld id="{F77B2DE9-D998-46EE-A7F6-2451886AED5C}" type="datetimeFigureOut">
               <a:rPr lang="zh-TW" altLang="en-US" smtClean="0"/>
               <a:pPr/>
-              <a:t>2013/5/18</a:t>
+              <a:t>2026/7/20</a:t>
             </a:fld>
             <a:endParaRPr lang="zh-TW" altLang="en-US"/>
           </a:p>
@@ -774,7 +790,7 @@
           <a:lstStyle/>
           <a:p>
             <a:r>
-              <a:rPr kumimoji="0" lang="zh-TW" altLang="en-US" smtClean="0"/>
+              <a:rPr kumimoji="0" lang="zh-TW" altLang="en-US"/>
               <a:t>按一下以編輯母片標題樣式</a:t>
             </a:r>
             <a:endParaRPr kumimoji="0" lang="en-US"/>
@@ -798,35 +814,35 @@
           <a:p>
             <a:pPr lvl="0" eaLnBrk="1" latinLnBrk="0" hangingPunct="1"/>
             <a:r>
-              <a:rPr lang="zh-TW" altLang="en-US" smtClean="0"/>
+              <a:rPr lang="zh-TW" altLang="en-US"/>
               <a:t>按一下以編輯母片文字樣式</a:t>
             </a:r>
           </a:p>
           <a:p>
             <a:pPr lvl="1" eaLnBrk="1" latinLnBrk="0" hangingPunct="1"/>
             <a:r>
-              <a:rPr lang="zh-TW" altLang="en-US" smtClean="0"/>
+              <a:rPr lang="zh-TW" altLang="en-US"/>
               <a:t>第二層</a:t>
             </a:r>
           </a:p>
           <a:p>
             <a:pPr lvl="2" eaLnBrk="1" latinLnBrk="0" hangingPunct="1"/>
             <a:r>
-              <a:rPr lang="zh-TW" altLang="en-US" smtClean="0"/>
+              <a:rPr lang="zh-TW" altLang="en-US"/>
               <a:t>第三層</a:t>
             </a:r>
           </a:p>
           <a:p>
             <a:pPr lvl="3" eaLnBrk="1" latinLnBrk="0" hangingPunct="1"/>
             <a:r>
-              <a:rPr lang="zh-TW" altLang="en-US" smtClean="0"/>
+              <a:rPr lang="zh-TW" altLang="en-US"/>
               <a:t>第四層</a:t>
             </a:r>
           </a:p>
           <a:p>
             <a:pPr lvl="4" eaLnBrk="1" latinLnBrk="0" hangingPunct="1"/>
             <a:r>
-              <a:rPr lang="zh-TW" altLang="en-US" smtClean="0"/>
+              <a:rPr lang="zh-TW" altLang="en-US"/>
               <a:t>第五層</a:t>
             </a:r>
             <a:endParaRPr kumimoji="0" lang="en-US"/>
@@ -851,7 +867,7 @@
             <a:fld id="{F77B2DE9-D998-46EE-A7F6-2451886AED5C}" type="datetimeFigureOut">
               <a:rPr lang="zh-TW" altLang="en-US" smtClean="0"/>
               <a:pPr/>
-              <a:t>2013/5/18</a:t>
+              <a:t>2026/7/20</a:t>
             </a:fld>
             <a:endParaRPr lang="zh-TW" altLang="en-US"/>
           </a:p>
@@ -955,7 +971,7 @@
           </a:lstStyle>
           <a:p>
             <a:r>
-              <a:rPr kumimoji="0" lang="zh-TW" altLang="en-US" smtClean="0"/>
+              <a:rPr kumimoji="0" lang="zh-TW" altLang="en-US"/>
               <a:t>按一下以編輯母片標題樣式</a:t>
             </a:r>
             <a:endParaRPr kumimoji="0" lang="en-US"/>
@@ -1065,35 +1081,35 @@
           <a:p>
             <a:pPr lvl="0" eaLnBrk="1" latinLnBrk="0" hangingPunct="1"/>
             <a:r>
-              <a:rPr lang="zh-TW" altLang="en-US" smtClean="0"/>
+              <a:rPr lang="zh-TW" altLang="en-US"/>
               <a:t>按一下以編輯母片文字樣式</a:t>
             </a:r>
           </a:p>
           <a:p>
             <a:pPr lvl="1" eaLnBrk="1" latinLnBrk="0" hangingPunct="1"/>
             <a:r>
-              <a:rPr lang="zh-TW" altLang="en-US" smtClean="0"/>
+              <a:rPr lang="zh-TW" altLang="en-US"/>
               <a:t>第二層</a:t>
             </a:r>
           </a:p>
           <a:p>
             <a:pPr lvl="2" eaLnBrk="1" latinLnBrk="0" hangingPunct="1"/>
             <a:r>
-              <a:rPr lang="zh-TW" altLang="en-US" smtClean="0"/>
+              <a:rPr lang="zh-TW" altLang="en-US"/>
               <a:t>第三層</a:t>
             </a:r>
           </a:p>
           <a:p>
             <a:pPr lvl="3" eaLnBrk="1" latinLnBrk="0" hangingPunct="1"/>
             <a:r>
-              <a:rPr lang="zh-TW" altLang="en-US" smtClean="0"/>
+              <a:rPr lang="zh-TW" altLang="en-US"/>
               <a:t>第四層</a:t>
             </a:r>
           </a:p>
           <a:p>
             <a:pPr lvl="4" eaLnBrk="1" latinLnBrk="0" hangingPunct="1"/>
             <a:r>
-              <a:rPr lang="zh-TW" altLang="en-US" smtClean="0"/>
+              <a:rPr lang="zh-TW" altLang="en-US"/>
               <a:t>第五層</a:t>
             </a:r>
             <a:endParaRPr kumimoji="0" lang="en-US"/>
@@ -1118,7 +1134,7 @@
             <a:fld id="{F77B2DE9-D998-46EE-A7F6-2451886AED5C}" type="datetimeFigureOut">
               <a:rPr lang="zh-TW" altLang="en-US" smtClean="0"/>
               <a:pPr/>
-              <a:t>2013/5/18</a:t>
+              <a:t>2026/7/20</a:t>
             </a:fld>
             <a:endParaRPr lang="zh-TW" altLang="en-US"/>
           </a:p>
@@ -1208,7 +1224,7 @@
           <a:lstStyle/>
           <a:p>
             <a:r>
-              <a:rPr kumimoji="0" lang="zh-TW" altLang="en-US" smtClean="0"/>
+              <a:rPr kumimoji="0" lang="zh-TW" altLang="en-US"/>
               <a:t>按一下以編輯母片標題樣式</a:t>
             </a:r>
             <a:endParaRPr kumimoji="0" lang="en-US"/>
@@ -1265,35 +1281,35 @@
           <a:p>
             <a:pPr lvl="0" eaLnBrk="1" latinLnBrk="0" hangingPunct="1"/>
             <a:r>
-              <a:rPr lang="zh-TW" altLang="en-US" smtClean="0"/>
+              <a:rPr lang="zh-TW" altLang="en-US"/>
               <a:t>按一下以編輯母片文字樣式</a:t>
             </a:r>
           </a:p>
           <a:p>
             <a:pPr lvl="1" eaLnBrk="1" latinLnBrk="0" hangingPunct="1"/>
             <a:r>
-              <a:rPr lang="zh-TW" altLang="en-US" smtClean="0"/>
+              <a:rPr lang="zh-TW" altLang="en-US"/>
               <a:t>第二層</a:t>
             </a:r>
           </a:p>
           <a:p>
             <a:pPr lvl="2" eaLnBrk="1" latinLnBrk="0" hangingPunct="1"/>
             <a:r>
-              <a:rPr lang="zh-TW" altLang="en-US" smtClean="0"/>
+              <a:rPr lang="zh-TW" altLang="en-US"/>
               <a:t>第三層</a:t>
             </a:r>
           </a:p>
           <a:p>
             <a:pPr lvl="3" eaLnBrk="1" latinLnBrk="0" hangingPunct="1"/>
             <a:r>
-              <a:rPr lang="zh-TW" altLang="en-US" smtClean="0"/>
+              <a:rPr lang="zh-TW" altLang="en-US"/>
               <a:t>第四層</a:t>
             </a:r>
           </a:p>
           <a:p>
             <a:pPr lvl="4" eaLnBrk="1" latinLnBrk="0" hangingPunct="1"/>
             <a:r>
-              <a:rPr lang="zh-TW" altLang="en-US" smtClean="0"/>
+              <a:rPr lang="zh-TW" altLang="en-US"/>
               <a:t>第五層</a:t>
             </a:r>
             <a:endParaRPr kumimoji="0" lang="en-US"/>
@@ -1350,35 +1366,35 @@
           <a:p>
             <a:pPr lvl="0" eaLnBrk="1" latinLnBrk="0" hangingPunct="1"/>
             <a:r>
-              <a:rPr lang="zh-TW" altLang="en-US" smtClean="0"/>
+              <a:rPr lang="zh-TW" altLang="en-US"/>
               <a:t>按一下以編輯母片文字樣式</a:t>
             </a:r>
           </a:p>
           <a:p>
             <a:pPr lvl="1" eaLnBrk="1" latinLnBrk="0" hangingPunct="1"/>
             <a:r>
-              <a:rPr lang="zh-TW" altLang="en-US" smtClean="0"/>
+              <a:rPr lang="zh-TW" altLang="en-US"/>
               <a:t>第二層</a:t>
             </a:r>
           </a:p>
           <a:p>
             <a:pPr lvl="2" eaLnBrk="1" latinLnBrk="0" hangingPunct="1"/>
             <a:r>
-              <a:rPr lang="zh-TW" altLang="en-US" smtClean="0"/>
+              <a:rPr lang="zh-TW" altLang="en-US"/>
               <a:t>第三層</a:t>
             </a:r>
           </a:p>
           <a:p>
             <a:pPr lvl="3" eaLnBrk="1" latinLnBrk="0" hangingPunct="1"/>
             <a:r>
-              <a:rPr lang="zh-TW" altLang="en-US" smtClean="0"/>
+              <a:rPr lang="zh-TW" altLang="en-US"/>
               <a:t>第四層</a:t>
             </a:r>
           </a:p>
           <a:p>
             <a:pPr lvl="4" eaLnBrk="1" latinLnBrk="0" hangingPunct="1"/>
             <a:r>
-              <a:rPr lang="zh-TW" altLang="en-US" smtClean="0"/>
+              <a:rPr lang="zh-TW" altLang="en-US"/>
               <a:t>第五層</a:t>
             </a:r>
             <a:endParaRPr kumimoji="0" lang="en-US"/>
@@ -1403,7 +1419,7 @@
             <a:fld id="{F77B2DE9-D998-46EE-A7F6-2451886AED5C}" type="datetimeFigureOut">
               <a:rPr lang="zh-TW" altLang="en-US" smtClean="0"/>
               <a:pPr/>
-              <a:t>2013/5/18</a:t>
+              <a:t>2026/7/20</a:t>
             </a:fld>
             <a:endParaRPr lang="zh-TW" altLang="en-US"/>
           </a:p>
@@ -1536,7 +1552,7 @@
           <a:p>
             <a:pPr lvl="0" eaLnBrk="1" latinLnBrk="0" hangingPunct="1"/>
             <a:r>
-              <a:rPr kumimoji="0" lang="zh-TW" altLang="en-US" smtClean="0"/>
+              <a:rPr kumimoji="0" lang="zh-TW" altLang="en-US"/>
               <a:t>按一下以編輯母片文字樣式</a:t>
             </a:r>
           </a:p>
@@ -1592,35 +1608,35 @@
           <a:p>
             <a:pPr lvl="0" eaLnBrk="1" latinLnBrk="0" hangingPunct="1"/>
             <a:r>
-              <a:rPr lang="zh-TW" altLang="en-US" smtClean="0"/>
+              <a:rPr lang="zh-TW" altLang="en-US"/>
               <a:t>按一下以編輯母片文字樣式</a:t>
             </a:r>
           </a:p>
           <a:p>
             <a:pPr lvl="1" eaLnBrk="1" latinLnBrk="0" hangingPunct="1"/>
             <a:r>
-              <a:rPr lang="zh-TW" altLang="en-US" smtClean="0"/>
+              <a:rPr lang="zh-TW" altLang="en-US"/>
               <a:t>第二層</a:t>
             </a:r>
           </a:p>
           <a:p>
             <a:pPr lvl="2" eaLnBrk="1" latinLnBrk="0" hangingPunct="1"/>
             <a:r>
-              <a:rPr lang="zh-TW" altLang="en-US" smtClean="0"/>
+              <a:rPr lang="zh-TW" altLang="en-US"/>
               <a:t>第三層</a:t>
             </a:r>
           </a:p>
           <a:p>
             <a:pPr lvl="3" eaLnBrk="1" latinLnBrk="0" hangingPunct="1"/>
             <a:r>
-              <a:rPr lang="zh-TW" altLang="en-US" smtClean="0"/>
+              <a:rPr lang="zh-TW" altLang="en-US"/>
               <a:t>第四層</a:t>
             </a:r>
           </a:p>
           <a:p>
             <a:pPr lvl="4" eaLnBrk="1" latinLnBrk="0" hangingPunct="1"/>
             <a:r>
-              <a:rPr lang="zh-TW" altLang="en-US" smtClean="0"/>
+              <a:rPr lang="zh-TW" altLang="en-US"/>
               <a:t>第五層</a:t>
             </a:r>
             <a:endParaRPr kumimoji="0" lang="en-US"/>
@@ -1686,7 +1702,7 @@
           <a:p>
             <a:pPr lvl="0" eaLnBrk="1" latinLnBrk="0" hangingPunct="1"/>
             <a:r>
-              <a:rPr kumimoji="0" lang="zh-TW" altLang="en-US" smtClean="0"/>
+              <a:rPr kumimoji="0" lang="zh-TW" altLang="en-US"/>
               <a:t>按一下以編輯母片文字樣式</a:t>
             </a:r>
           </a:p>
@@ -1742,35 +1758,35 @@
           <a:p>
             <a:pPr lvl="0" eaLnBrk="1" latinLnBrk="0" hangingPunct="1"/>
             <a:r>
-              <a:rPr lang="zh-TW" altLang="en-US" smtClean="0"/>
+              <a:rPr lang="zh-TW" altLang="en-US"/>
               <a:t>按一下以編輯母片文字樣式</a:t>
             </a:r>
           </a:p>
           <a:p>
             <a:pPr lvl="1" eaLnBrk="1" latinLnBrk="0" hangingPunct="1"/>
             <a:r>
-              <a:rPr lang="zh-TW" altLang="en-US" smtClean="0"/>
+              <a:rPr lang="zh-TW" altLang="en-US"/>
               <a:t>第二層</a:t>
             </a:r>
           </a:p>
           <a:p>
             <a:pPr lvl="2" eaLnBrk="1" latinLnBrk="0" hangingPunct="1"/>
             <a:r>
-              <a:rPr lang="zh-TW" altLang="en-US" smtClean="0"/>
+              <a:rPr lang="zh-TW" altLang="en-US"/>
               <a:t>第三層</a:t>
             </a:r>
           </a:p>
           <a:p>
             <a:pPr lvl="3" eaLnBrk="1" latinLnBrk="0" hangingPunct="1"/>
             <a:r>
-              <a:rPr lang="zh-TW" altLang="en-US" smtClean="0"/>
+              <a:rPr lang="zh-TW" altLang="en-US"/>
               <a:t>第四層</a:t>
             </a:r>
           </a:p>
           <a:p>
             <a:pPr lvl="4" eaLnBrk="1" latinLnBrk="0" hangingPunct="1"/>
             <a:r>
-              <a:rPr lang="zh-TW" altLang="en-US" smtClean="0"/>
+              <a:rPr lang="zh-TW" altLang="en-US"/>
               <a:t>第五層</a:t>
             </a:r>
             <a:endParaRPr kumimoji="0" lang="en-US"/>
@@ -1795,7 +1811,7 @@
             <a:fld id="{F77B2DE9-D998-46EE-A7F6-2451886AED5C}" type="datetimeFigureOut">
               <a:rPr lang="zh-TW" altLang="en-US" smtClean="0"/>
               <a:pPr/>
-              <a:t>2013/5/18</a:t>
+              <a:t>2026/7/20</a:t>
             </a:fld>
             <a:endParaRPr lang="zh-TW" altLang="en-US"/>
           </a:p>
@@ -1864,7 +1880,7 @@
           </a:lstStyle>
           <a:p>
             <a:r>
-              <a:rPr kumimoji="0" lang="zh-TW" altLang="en-US" smtClean="0"/>
+              <a:rPr kumimoji="0" lang="zh-TW" altLang="en-US"/>
               <a:t>按一下以編輯母片標題樣式</a:t>
             </a:r>
             <a:endParaRPr kumimoji="0" lang="en-US"/>
@@ -1912,7 +1928,7 @@
           <a:lstStyle/>
           <a:p>
             <a:r>
-              <a:rPr kumimoji="0" lang="zh-TW" altLang="en-US" smtClean="0"/>
+              <a:rPr kumimoji="0" lang="zh-TW" altLang="en-US"/>
               <a:t>按一下以編輯母片標題樣式</a:t>
             </a:r>
             <a:endParaRPr kumimoji="0" lang="en-US"/>
@@ -1937,7 +1953,7 @@
             <a:fld id="{F77B2DE9-D998-46EE-A7F6-2451886AED5C}" type="datetimeFigureOut">
               <a:rPr lang="zh-TW" altLang="en-US" smtClean="0"/>
               <a:pPr/>
-              <a:t>2013/5/18</a:t>
+              <a:t>2026/7/20</a:t>
             </a:fld>
             <a:endParaRPr lang="zh-TW" altLang="en-US"/>
           </a:p>
@@ -2029,7 +2045,7 @@
             <a:fld id="{F77B2DE9-D998-46EE-A7F6-2451886AED5C}" type="datetimeFigureOut">
               <a:rPr lang="zh-TW" altLang="en-US" smtClean="0"/>
               <a:pPr/>
-              <a:t>2013/5/18</a:t>
+              <a:t>2026/7/20</a:t>
             </a:fld>
             <a:endParaRPr lang="zh-TW" altLang="en-US"/>
           </a:p>
@@ -2153,7 +2169,7 @@
           </a:lstStyle>
           <a:p>
             <a:r>
-              <a:rPr kumimoji="0" lang="zh-TW" altLang="en-US" smtClean="0"/>
+              <a:rPr kumimoji="0" lang="zh-TW" altLang="en-US"/>
               <a:t>按一下以編輯母片標題樣式</a:t>
             </a:r>
             <a:endParaRPr kumimoji="0" lang="en-US"/>
@@ -2210,35 +2226,35 @@
           <a:p>
             <a:pPr lvl="0" eaLnBrk="1" latinLnBrk="0" hangingPunct="1"/>
             <a:r>
-              <a:rPr lang="zh-TW" altLang="en-US" smtClean="0"/>
+              <a:rPr lang="zh-TW" altLang="en-US"/>
               <a:t>按一下以編輯母片文字樣式</a:t>
             </a:r>
           </a:p>
           <a:p>
             <a:pPr lvl="1" eaLnBrk="1" latinLnBrk="0" hangingPunct="1"/>
             <a:r>
-              <a:rPr lang="zh-TW" altLang="en-US" smtClean="0"/>
+              <a:rPr lang="zh-TW" altLang="en-US"/>
               <a:t>第二層</a:t>
             </a:r>
           </a:p>
           <a:p>
             <a:pPr lvl="2" eaLnBrk="1" latinLnBrk="0" hangingPunct="1"/>
             <a:r>
-              <a:rPr lang="zh-TW" altLang="en-US" smtClean="0"/>
+              <a:rPr lang="zh-TW" altLang="en-US"/>
               <a:t>第三層</a:t>
             </a:r>
           </a:p>
           <a:p>
             <a:pPr lvl="3" eaLnBrk="1" latinLnBrk="0" hangingPunct="1"/>
             <a:r>
-              <a:rPr lang="zh-TW" altLang="en-US" smtClean="0"/>
+              <a:rPr lang="zh-TW" altLang="en-US"/>
               <a:t>第四層</a:t>
             </a:r>
           </a:p>
           <a:p>
             <a:pPr lvl="4" eaLnBrk="1" latinLnBrk="0" hangingPunct="1"/>
             <a:r>
-              <a:rPr lang="zh-TW" altLang="en-US" smtClean="0"/>
+              <a:rPr lang="zh-TW" altLang="en-US"/>
               <a:t>第五層</a:t>
             </a:r>
             <a:endParaRPr kumimoji="0" lang="en-US"/>
@@ -2304,35 +2320,35 @@
           <a:p>
             <a:pPr lvl="0" eaLnBrk="1" latinLnBrk="0" hangingPunct="1"/>
             <a:r>
-              <a:rPr lang="zh-TW" altLang="en-US" smtClean="0"/>
+              <a:rPr lang="zh-TW" altLang="en-US"/>
               <a:t>按一下以編輯母片文字樣式</a:t>
             </a:r>
           </a:p>
           <a:p>
             <a:pPr lvl="1" eaLnBrk="1" latinLnBrk="0" hangingPunct="1"/>
             <a:r>
-              <a:rPr lang="zh-TW" altLang="en-US" smtClean="0"/>
+              <a:rPr lang="zh-TW" altLang="en-US"/>
               <a:t>第二層</a:t>
             </a:r>
           </a:p>
           <a:p>
             <a:pPr lvl="2" eaLnBrk="1" latinLnBrk="0" hangingPunct="1"/>
             <a:r>
-              <a:rPr lang="zh-TW" altLang="en-US" smtClean="0"/>
+              <a:rPr lang="zh-TW" altLang="en-US"/>
               <a:t>第三層</a:t>
             </a:r>
           </a:p>
           <a:p>
             <a:pPr lvl="3" eaLnBrk="1" latinLnBrk="0" hangingPunct="1"/>
             <a:r>
-              <a:rPr lang="zh-TW" altLang="en-US" smtClean="0"/>
+              <a:rPr lang="zh-TW" altLang="en-US"/>
               <a:t>第四層</a:t>
             </a:r>
           </a:p>
           <a:p>
             <a:pPr lvl="4" eaLnBrk="1" latinLnBrk="0" hangingPunct="1"/>
             <a:r>
-              <a:rPr lang="zh-TW" altLang="en-US" smtClean="0"/>
+              <a:rPr lang="zh-TW" altLang="en-US"/>
               <a:t>第五層</a:t>
             </a:r>
             <a:endParaRPr kumimoji="0" lang="en-US"/>
@@ -2357,7 +2373,7 @@
             <a:fld id="{F77B2DE9-D998-46EE-A7F6-2451886AED5C}" type="datetimeFigureOut">
               <a:rPr lang="zh-TW" altLang="en-US" smtClean="0"/>
               <a:pPr/>
-              <a:t>2013/5/18</a:t>
+              <a:t>2026/7/20</a:t>
             </a:fld>
             <a:endParaRPr lang="zh-TW" altLang="en-US"/>
           </a:p>
@@ -2659,7 +2675,7 @@
           </a:lstStyle>
           <a:p>
             <a:r>
-              <a:rPr kumimoji="0" lang="zh-TW" altLang="en-US" smtClean="0"/>
+              <a:rPr kumimoji="0" lang="zh-TW" altLang="en-US"/>
               <a:t>按一下圖示以新增圖片</a:t>
             </a:r>
             <a:endParaRPr kumimoji="0" lang="en-US"/>
@@ -2712,7 +2728,7 @@
           </a:lstStyle>
           <a:p>
             <a:r>
-              <a:rPr kumimoji="0" lang="zh-TW" altLang="en-US" smtClean="0"/>
+              <a:rPr kumimoji="0" lang="zh-TW" altLang="en-US"/>
               <a:t>按一下以編輯母片標題樣式</a:t>
             </a:r>
             <a:endParaRPr kumimoji="0" lang="en-US"/>
@@ -2778,35 +2794,35 @@
           <a:p>
             <a:pPr lvl="0" eaLnBrk="1" latinLnBrk="0" hangingPunct="1"/>
             <a:r>
-              <a:rPr lang="zh-TW" altLang="en-US" smtClean="0"/>
+              <a:rPr lang="zh-TW" altLang="en-US"/>
               <a:t>按一下以編輯母片文字樣式</a:t>
             </a:r>
           </a:p>
           <a:p>
             <a:pPr lvl="1" eaLnBrk="1" latinLnBrk="0" hangingPunct="1"/>
             <a:r>
-              <a:rPr lang="zh-TW" altLang="en-US" smtClean="0"/>
+              <a:rPr lang="zh-TW" altLang="en-US"/>
               <a:t>第二層</a:t>
             </a:r>
           </a:p>
           <a:p>
             <a:pPr lvl="2" eaLnBrk="1" latinLnBrk="0" hangingPunct="1"/>
             <a:r>
-              <a:rPr lang="zh-TW" altLang="en-US" smtClean="0"/>
+              <a:rPr lang="zh-TW" altLang="en-US"/>
               <a:t>第三層</a:t>
             </a:r>
           </a:p>
           <a:p>
             <a:pPr lvl="3" eaLnBrk="1" latinLnBrk="0" hangingPunct="1"/>
             <a:r>
-              <a:rPr lang="zh-TW" altLang="en-US" smtClean="0"/>
+              <a:rPr lang="zh-TW" altLang="en-US"/>
               <a:t>第四層</a:t>
             </a:r>
           </a:p>
           <a:p>
             <a:pPr lvl="4" eaLnBrk="1" latinLnBrk="0" hangingPunct="1"/>
             <a:r>
-              <a:rPr lang="zh-TW" altLang="en-US" smtClean="0"/>
+              <a:rPr lang="zh-TW" altLang="en-US"/>
               <a:t>第五層</a:t>
             </a:r>
             <a:endParaRPr kumimoji="0" lang="en-US"/>
@@ -2831,7 +2847,7 @@
             <a:fld id="{F77B2DE9-D998-46EE-A7F6-2451886AED5C}" type="datetimeFigureOut">
               <a:rPr lang="zh-TW" altLang="en-US" smtClean="0"/>
               <a:pPr/>
-              <a:t>2013/5/18</a:t>
+              <a:t>2026/7/20</a:t>
             </a:fld>
             <a:endParaRPr lang="zh-TW" altLang="en-US"/>
           </a:p>
@@ -2949,7 +2965,7 @@
           <a:lstStyle/>
           <a:p>
             <a:r>
-              <a:rPr kumimoji="0" lang="zh-TW" altLang="en-US" smtClean="0"/>
+              <a:rPr kumimoji="0" lang="zh-TW" altLang="en-US"/>
               <a:t>按一下以編輯母片標題樣式</a:t>
             </a:r>
             <a:endParaRPr kumimoji="0" lang="en-US"/>
@@ -2983,35 +2999,35 @@
           <a:p>
             <a:pPr lvl="0" eaLnBrk="1" latinLnBrk="0" hangingPunct="1"/>
             <a:r>
-              <a:rPr kumimoji="0" lang="zh-TW" altLang="en-US" smtClean="0"/>
+              <a:rPr kumimoji="0" lang="zh-TW" altLang="en-US"/>
               <a:t>按一下以編輯母片文字樣式</a:t>
             </a:r>
           </a:p>
           <a:p>
             <a:pPr lvl="1" eaLnBrk="1" latinLnBrk="0" hangingPunct="1"/>
             <a:r>
-              <a:rPr kumimoji="0" lang="zh-TW" altLang="en-US" smtClean="0"/>
+              <a:rPr kumimoji="0" lang="zh-TW" altLang="en-US"/>
               <a:t>第二層</a:t>
             </a:r>
           </a:p>
           <a:p>
             <a:pPr lvl="2" eaLnBrk="1" latinLnBrk="0" hangingPunct="1"/>
             <a:r>
-              <a:rPr kumimoji="0" lang="zh-TW" altLang="en-US" smtClean="0"/>
+              <a:rPr kumimoji="0" lang="zh-TW" altLang="en-US"/>
               <a:t>第三層</a:t>
             </a:r>
           </a:p>
           <a:p>
             <a:pPr lvl="3" eaLnBrk="1" latinLnBrk="0" hangingPunct="1"/>
             <a:r>
-              <a:rPr kumimoji="0" lang="zh-TW" altLang="en-US" smtClean="0"/>
+              <a:rPr kumimoji="0" lang="zh-TW" altLang="en-US"/>
               <a:t>第四層</a:t>
             </a:r>
           </a:p>
           <a:p>
             <a:pPr lvl="4" eaLnBrk="1" latinLnBrk="0" hangingPunct="1"/>
             <a:r>
-              <a:rPr kumimoji="0" lang="zh-TW" altLang="en-US" smtClean="0"/>
+              <a:rPr kumimoji="0" lang="zh-TW" altLang="en-US"/>
               <a:t>第五層</a:t>
             </a:r>
             <a:endParaRPr kumimoji="0" lang="en-US"/>
@@ -3054,7 +3070,7 @@
             <a:fld id="{F77B2DE9-D998-46EE-A7F6-2451886AED5C}" type="datetimeFigureOut">
               <a:rPr lang="zh-TW" altLang="en-US" smtClean="0"/>
               <a:pPr/>
-              <a:t>2013/5/18</a:t>
+              <a:t>2026/7/20</a:t>
             </a:fld>
             <a:endParaRPr lang="zh-TW" altLang="en-US"/>
           </a:p>
@@ -3557,13 +3573,8 @@
             </a:pPr>
             <a:r>
               <a:rPr lang="zh-TW" altLang="en-US" sz="5400" dirty="0"/>
-              <a:t>耶穌基督降在世間</a:t>
-            </a:r>
-            <a:r>
-              <a:rPr lang="zh-TW" altLang="en-US" sz="5400" dirty="0" smtClean="0"/>
-              <a:t>上</a:t>
-            </a:r>
-            <a:endParaRPr lang="zh-TW" altLang="en-US" sz="5400" dirty="0"/>
+              <a:t>耶穌基督降在世間上</a:t>
+            </a:r>
           </a:p>
           <a:p>
             <a:pPr algn="ctr">
@@ -3571,13 +3582,8 @@
             </a:pPr>
             <a:r>
               <a:rPr lang="zh-TW" altLang="en-US" sz="5400" dirty="0"/>
-              <a:t>為挽救一切</a:t>
-            </a:r>
-            <a:r>
-              <a:rPr lang="zh-TW" altLang="en-US" sz="5400" dirty="0" smtClean="0"/>
-              <a:t>眾生</a:t>
-            </a:r>
-            <a:endParaRPr lang="zh-TW" altLang="en-US" sz="5400" dirty="0"/>
+              <a:t>為挽救一切眾生</a:t>
+            </a:r>
           </a:p>
           <a:p>
             <a:pPr algn="ctr">
@@ -3604,13 +3610,6 @@
   <p:clrMapOvr>
     <a:masterClrMapping/>
   </p:clrMapOvr>
-  <p:timing>
-    <p:tnLst>
-      <p:par>
-        <p:cTn id="1" dur="indefinite" restart="never" nodeType="tmRoot"/>
-      </p:par>
-    </p:tnLst>
-  </p:timing>
 </p:sld>
 </file>
 
@@ -3677,13 +3676,8 @@
             </a:pPr>
             <a:r>
               <a:rPr lang="zh-TW" altLang="en-US" sz="5400" dirty="0"/>
-              <a:t>為世人作</a:t>
-            </a:r>
-            <a:r>
-              <a:rPr lang="zh-TW" altLang="en-US" sz="5400" dirty="0" smtClean="0"/>
-              <a:t>犧牲</a:t>
-            </a:r>
-            <a:endParaRPr lang="zh-TW" altLang="en-US" sz="5400" dirty="0"/>
+              <a:t>為世人作犧牲</a:t>
+            </a:r>
           </a:p>
           <a:p>
             <a:pPr algn="ctr">
@@ -3691,13 +3685,8 @@
             </a:pPr>
             <a:r>
               <a:rPr lang="zh-TW" altLang="en-US" sz="5400" dirty="0"/>
-              <a:t>為世人傳真</a:t>
-            </a:r>
-            <a:r>
-              <a:rPr lang="zh-TW" altLang="en-US" sz="5400" dirty="0" smtClean="0"/>
-              <a:t>義</a:t>
-            </a:r>
-            <a:endParaRPr lang="zh-TW" altLang="en-US" sz="5400" dirty="0"/>
+              <a:t>為世人傳真義</a:t>
+            </a:r>
           </a:p>
           <a:p>
             <a:pPr algn="ctr">
@@ -3705,13 +3694,8 @@
             </a:pPr>
             <a:r>
               <a:rPr lang="zh-TW" altLang="en-US" sz="5400" dirty="0"/>
-              <a:t>偉大耶穌基督</a:t>
-            </a:r>
-            <a:r>
-              <a:rPr lang="zh-TW" altLang="en-US" sz="5400" dirty="0" smtClean="0"/>
-              <a:t>你</a:t>
-            </a:r>
-            <a:endParaRPr lang="zh-TW" altLang="en-US" sz="5400" dirty="0"/>
+              <a:t>偉大耶穌基督祢</a:t>
+            </a:r>
           </a:p>
           <a:p>
             <a:pPr algn="ctr">
@@ -3719,13 +3703,8 @@
             </a:pPr>
             <a:r>
               <a:rPr lang="zh-TW" altLang="en-US" sz="5400" dirty="0"/>
-              <a:t>捱盡痛苦在寶架</a:t>
-            </a:r>
-            <a:r>
-              <a:rPr lang="zh-TW" altLang="en-US" sz="5400" dirty="0" smtClean="0"/>
-              <a:t>上</a:t>
-            </a:r>
-            <a:endParaRPr lang="zh-TW" altLang="en-US" sz="5400" dirty="0"/>
+              <a:t>捱盡痛苦在寶架上</a:t>
+            </a:r>
           </a:p>
         </p:txBody>
       </p:sp>
@@ -3734,13 +3713,6 @@
   <p:clrMapOvr>
     <a:masterClrMapping/>
   </p:clrMapOvr>
-  <p:timing>
-    <p:tnLst>
-      <p:par>
-        <p:cTn id="1" dur="indefinite" restart="never" nodeType="tmRoot"/>
-      </p:par>
-    </p:tnLst>
-  </p:timing>
 </p:sld>
 </file>
 
@@ -3838,11 +3810,7 @@
             </a:r>
             <a:r>
               <a:rPr lang="zh-TW" altLang="en-US" sz="5400"/>
-              <a:t>我</a:t>
-            </a:r>
-            <a:r>
-              <a:rPr lang="zh-TW" altLang="en-US" sz="5400" smtClean="0"/>
-              <a:t>堅定</a:t>
+              <a:t>我堅定</a:t>
             </a:r>
             <a:r>
               <a:rPr lang="zh-TW" altLang="en-US" sz="5400" dirty="0"/>
@@ -3940,8 +3908,13 @@
             </a:pPr>
             <a:r>
               <a:rPr lang="zh-TW" altLang="en-US" sz="5400" dirty="0"/>
-              <a:t>信從耶穌基督你</a:t>
-            </a:r>
+              <a:t>信從耶穌</a:t>
+            </a:r>
+            <a:r>
+              <a:rPr lang="zh-TW" altLang="en-US" sz="5400"/>
+              <a:t>基督祢</a:t>
+            </a:r>
+            <a:endParaRPr lang="zh-TW" altLang="en-US" sz="5400" dirty="0"/>
           </a:p>
           <a:p>
             <a:pPr algn="ctr">
